--- a/Lesson16-ManualReActLoop/Lesson16-ManualReActLoop.pptx
+++ b/Lesson16-ManualReActLoop/Lesson16-ManualReActLoop.pptx
@@ -1303,7 +1303,7 @@
           <a:p>
             <a:r>
               <a:rPr lang="en-US" dirty="0"/>
-              <a:t>Try this on your own. Track whether the loop exited because the model stopped asking for tools or because it ran out of iterations, and print a clear status line either way, including how many iterations were used. Test the second path by temporarily lowering the cap to one. Then extend SearchDatabase with a second fact, such as the device's weight, and change the goal to ask for both facts. Check that you still see exactly one OBSERVATION line for every tool call the model makes.</a:t>
+              <a:t>Try this on your own. Track whether the loop exited because the model stopped asking for tools or because it ran out of iterations, and print a clear status line either way, including how many iterations were used. Test the second path by temporarily lowering the cap to one. Then extend SearchDatabase in ResearchPlugin.cs with a second fact, such as the device's weight, and change the goal to ask for both facts. Check that you still see exactly one OBSERVATION line for every tool call the model makes.</a:t>
             </a:r>
             <a:endParaRPr lang="en-US" dirty="0"/>
           </a:p>
